--- a/sample/graph6.pptx
+++ b/sample/graph6.pptx
@@ -183,7 +183,7 @@
           </a:ln>
         </p:spPr>
         <p:txBody>
-          <a:bodyPr rtlCol="0" anchor="ctr" lIns="18288" tIns="9144" rIns="18288" bIns="9144"/>
+          <a:bodyPr rtlCol="0" anchor="ctr" wrap="none" lIns="18288" tIns="9144" rIns="18288" bIns="9144"/>
           <a:lstStyle/>
           <a:p>
             <a:pPr algn="ctr">
@@ -230,7 +230,7 @@
           </a:ln>
         </p:spPr>
         <p:txBody>
-          <a:bodyPr rtlCol="0" anchor="ctr" lIns="18288" tIns="9144" rIns="18288" bIns="9144"/>
+          <a:bodyPr rtlCol="0" anchor="ctr" wrap="none" lIns="18288" tIns="9144" rIns="18288" bIns="9144"/>
           <a:lstStyle/>
           <a:p>
             <a:pPr algn="ctr">
@@ -277,7 +277,7 @@
           </a:ln>
         </p:spPr>
         <p:txBody>
-          <a:bodyPr rtlCol="0" anchor="ctr" lIns="18288" tIns="9144" rIns="18288" bIns="9144"/>
+          <a:bodyPr rtlCol="0" anchor="ctr" wrap="none" lIns="18288" tIns="9144" rIns="18288" bIns="9144"/>
           <a:lstStyle/>
           <a:p>
             <a:pPr algn="ctr">
@@ -324,7 +324,7 @@
           </a:ln>
         </p:spPr>
         <p:txBody>
-          <a:bodyPr rtlCol="0" anchor="ctr" lIns="18288" tIns="9144" rIns="18288" bIns="9144"/>
+          <a:bodyPr rtlCol="0" anchor="ctr" wrap="none" lIns="18288" tIns="9144" rIns="18288" bIns="9144"/>
           <a:lstStyle/>
           <a:p>
             <a:pPr algn="ctr">
@@ -371,7 +371,7 @@
           </a:ln>
         </p:spPr>
         <p:txBody>
-          <a:bodyPr rtlCol="0" anchor="ctr" lIns="18288" tIns="9144" rIns="18288" bIns="9144"/>
+          <a:bodyPr rtlCol="0" anchor="ctr" wrap="none" lIns="18288" tIns="9144" rIns="18288" bIns="9144"/>
           <a:lstStyle/>
           <a:p>
             <a:pPr algn="ctr">
@@ -418,7 +418,7 @@
           </a:ln>
         </p:spPr>
         <p:txBody>
-          <a:bodyPr rtlCol="0" anchor="ctr" lIns="18288" tIns="9144" rIns="18288" bIns="9144"/>
+          <a:bodyPr rtlCol="0" anchor="ctr" wrap="none" lIns="18288" tIns="9144" rIns="18288" bIns="9144"/>
           <a:lstStyle/>
           <a:p>
             <a:pPr algn="ctr">
@@ -511,7 +511,7 @@
           </a:ln>
         </p:spPr>
         <p:txBody>
-          <a:bodyPr rtlCol="0" anchor="ctr" lIns="18288" tIns="9144" rIns="18288" bIns="9144"/>
+          <a:bodyPr rtlCol="0" anchor="ctr" wrap="none" lIns="18288" tIns="9144" rIns="18288" bIns="9144"/>
           <a:lstStyle/>
           <a:p>
             <a:pPr algn="ctr">

--- a/sample/graph6.pptx
+++ b/sample/graph6.pptx
@@ -769,8 +769,8 @@
         </p:nvSpPr>
         <p:spPr>
           <a:xfrm>
-            <a:off x="4637484" y="2714625"/>
-            <a:ext cx="2881313" cy="285750"/>
+            <a:off x="4764030" y="2714625"/>
+            <a:ext cx="2628221" cy="285750"/>
           </a:xfrm>
           <a:prstGeom prst="rect">
             <a:avLst/>
@@ -851,8 +851,8 @@
         </p:nvSpPr>
         <p:spPr>
           <a:xfrm>
-            <a:off x="6846094" y="3762375"/>
-            <a:ext cx="797719" cy="285750"/>
+            <a:off x="6859119" y="3762375"/>
+            <a:ext cx="771668" cy="285750"/>
           </a:xfrm>
           <a:prstGeom prst="rect">
             <a:avLst/>
@@ -892,8 +892,8 @@
         </p:nvSpPr>
         <p:spPr>
           <a:xfrm>
-            <a:off x="5298281" y="4286250"/>
-            <a:ext cx="1583531" cy="285750"/>
+            <a:off x="5321308" y="4286250"/>
+            <a:ext cx="1537478" cy="285750"/>
           </a:xfrm>
           <a:prstGeom prst="rect">
             <a:avLst/>
